--- a/docs/Rain2FloodNet.pptx
+++ b/docs/Rain2FloodNet.pptx
@@ -297,7 +297,7 @@
           <a:p>
             <a:fld id="{DD207BFC-72DA-481F-83B9-66915BC36601}" type="datetimeFigureOut">
               <a:rPr lang="ko-KR" altLang="en-US" smtClean="0"/>
-              <a:t>2025-05-14</a:t>
+              <a:t>2026-05-08</a:t>
             </a:fld>
             <a:endParaRPr lang="ko-KR" altLang="en-US"/>
           </a:p>
@@ -33274,15 +33274,7 @@
             </a:pPr>
             <a:r>
               <a:rPr lang="ko-KR" altLang="en-US" dirty="0"/>
-              <a:t>정보과학회 </a:t>
-            </a:r>
-            <a:r>
-              <a:rPr lang="en-US" altLang="ko-KR" dirty="0"/>
-              <a:t>4.28 </a:t>
-            </a:r>
-            <a:r>
-              <a:rPr lang="ko-KR" altLang="en-US" dirty="0"/>
-              <a:t>논문 투고 및 심사 중</a:t>
+              <a:t>정보과학회 논문 투고</a:t>
             </a:r>
             <a:endParaRPr lang="en-US" altLang="ko-KR" dirty="0"/>
           </a:p>
@@ -33297,15 +33289,7 @@
             </a:r>
             <a:r>
               <a:rPr lang="ko-KR" altLang="en-US" dirty="0"/>
-              <a:t> </a:t>
-            </a:r>
-            <a:r>
-              <a:rPr lang="en-US" altLang="ko-KR" dirty="0"/>
-              <a:t>5.10 </a:t>
-            </a:r>
-            <a:r>
-              <a:rPr lang="ko-KR" altLang="en-US" dirty="0"/>
-              <a:t>논문 투고 및 심사 중</a:t>
+              <a:t> 논문 투고</a:t>
             </a:r>
             <a:endParaRPr lang="en-US" altLang="ko-KR" dirty="0"/>
           </a:p>
